--- a/figures/north_maluku_consumption.pptx
+++ b/figures/north_maluku_consumption.pptx
@@ -14,7 +14,9 @@
     <p:sldId id="261" r:id="rId8"/>
     <p:sldId id="262" r:id="rId9"/>
     <p:sldId id="263" r:id="rId10"/>
-    <p:sldId id="264" r:id="rId11"/>
+    <p:sldId id="266" r:id="rId11"/>
+    <p:sldId id="267" r:id="rId12"/>
+    <p:sldId id="264" r:id="rId13"/>
   </p:sldIdLst>
   <p:sldSz cx="12192000" cy="6858000"/>
   <p:notesSz cx="6858000" cy="9144000"/>
@@ -311,7 +313,7 @@
           <a:p>
             <a:fld id="{5BCAD085-E8A6-8845-BD4E-CB4CCA059FC4}" type="datetimeFigureOut">
               <a:rPr lang="en-US" smtClean="0"/>
-              <a:t>9/2/26</a:t>
+              <a:t>9/8/26</a:t>
             </a:fld>
             <a:endParaRPr lang="en-US"/>
           </a:p>
@@ -479,7 +481,7 @@
           <a:p>
             <a:fld id="{5BCAD085-E8A6-8845-BD4E-CB4CCA059FC4}" type="datetimeFigureOut">
               <a:rPr lang="en-US" smtClean="0"/>
-              <a:t>9/2/26</a:t>
+              <a:t>9/8/26</a:t>
             </a:fld>
             <a:endParaRPr lang="en-US"/>
           </a:p>
@@ -657,7 +659,7 @@
           <a:p>
             <a:fld id="{5BCAD085-E8A6-8845-BD4E-CB4CCA059FC4}" type="datetimeFigureOut">
               <a:rPr lang="en-US" smtClean="0"/>
-              <a:t>9/2/26</a:t>
+              <a:t>9/8/26</a:t>
             </a:fld>
             <a:endParaRPr lang="en-US"/>
           </a:p>
@@ -825,7 +827,7 @@
           <a:p>
             <a:fld id="{5BCAD085-E8A6-8845-BD4E-CB4CCA059FC4}" type="datetimeFigureOut">
               <a:rPr lang="en-US" smtClean="0"/>
-              <a:t>9/2/26</a:t>
+              <a:t>9/8/26</a:t>
             </a:fld>
             <a:endParaRPr lang="en-US"/>
           </a:p>
@@ -1070,7 +1072,7 @@
           <a:p>
             <a:fld id="{5BCAD085-E8A6-8845-BD4E-CB4CCA059FC4}" type="datetimeFigureOut">
               <a:rPr lang="en-US" smtClean="0"/>
-              <a:t>9/2/26</a:t>
+              <a:t>9/8/26</a:t>
             </a:fld>
             <a:endParaRPr lang="en-US"/>
           </a:p>
@@ -1355,7 +1357,7 @@
           <a:p>
             <a:fld id="{5BCAD085-E8A6-8845-BD4E-CB4CCA059FC4}" type="datetimeFigureOut">
               <a:rPr lang="en-US" smtClean="0"/>
-              <a:t>9/2/26</a:t>
+              <a:t>9/8/26</a:t>
             </a:fld>
             <a:endParaRPr lang="en-US"/>
           </a:p>
@@ -1774,7 +1776,7 @@
           <a:p>
             <a:fld id="{5BCAD085-E8A6-8845-BD4E-CB4CCA059FC4}" type="datetimeFigureOut">
               <a:rPr lang="en-US" smtClean="0"/>
-              <a:t>9/2/26</a:t>
+              <a:t>9/8/26</a:t>
             </a:fld>
             <a:endParaRPr lang="en-US"/>
           </a:p>
@@ -1891,7 +1893,7 @@
           <a:p>
             <a:fld id="{5BCAD085-E8A6-8845-BD4E-CB4CCA059FC4}" type="datetimeFigureOut">
               <a:rPr lang="en-US" smtClean="0"/>
-              <a:t>9/2/26</a:t>
+              <a:t>9/8/26</a:t>
             </a:fld>
             <a:endParaRPr lang="en-US"/>
           </a:p>
@@ -1986,7 +1988,7 @@
           <a:p>
             <a:fld id="{5BCAD085-E8A6-8845-BD4E-CB4CCA059FC4}" type="datetimeFigureOut">
               <a:rPr lang="en-US" smtClean="0"/>
-              <a:t>9/2/26</a:t>
+              <a:t>9/8/26</a:t>
             </a:fld>
             <a:endParaRPr lang="en-US"/>
           </a:p>
@@ -2261,7 +2263,7 @@
           <a:p>
             <a:fld id="{5BCAD085-E8A6-8845-BD4E-CB4CCA059FC4}" type="datetimeFigureOut">
               <a:rPr lang="en-US" smtClean="0"/>
-              <a:t>9/2/26</a:t>
+              <a:t>9/8/26</a:t>
             </a:fld>
             <a:endParaRPr lang="en-US"/>
           </a:p>
@@ -2513,7 +2515,7 @@
           <a:p>
             <a:fld id="{5BCAD085-E8A6-8845-BD4E-CB4CCA059FC4}" type="datetimeFigureOut">
               <a:rPr lang="en-US" smtClean="0"/>
-              <a:t>9/2/26</a:t>
+              <a:t>9/8/26</a:t>
             </a:fld>
             <a:endParaRPr lang="en-US"/>
           </a:p>
@@ -2724,7 +2726,7 @@
           <a:p>
             <a:fld id="{5BCAD085-E8A6-8845-BD4E-CB4CCA059FC4}" type="datetimeFigureOut">
               <a:rPr lang="en-US" smtClean="0"/>
-              <a:t>9/2/26</a:t>
+              <a:t>9/8/26</a:t>
             </a:fld>
             <a:endParaRPr lang="en-US"/>
           </a:p>
@@ -3326,7 +3328,7 @@
         <p:spPr>
           <a:xfrm>
             <a:off x="457200" y="292608"/>
-            <a:ext cx="11247120" cy="640080"/>
+            <a:ext cx="11247120" cy="461665"/>
           </a:xfrm>
           <a:prstGeom prst="rect">
             <a:avLst/>
@@ -3345,24 +3347,24 @@
               </a:spcAft>
             </a:pPr>
             <a:r>
-              <a:rPr sz="2400" b="1">
-                <a:latin typeface="Arial"/>
-              </a:rPr>
-              <a:t>Summary: What Aquatic Foods Contribute</a:t>
-            </a:r>
-          </a:p>
-        </p:txBody>
-      </p:sp>
-      <p:sp>
-        <p:nvSpPr>
-          <p:cNvPr id="3" name="TextBox 2"/>
+              <a:rPr sz="2400" b="1" dirty="0">
+                <a:latin typeface="Arial"/>
+              </a:rPr>
+              <a:t>Data Quality: Missing Values by Nutrient</a:t>
+            </a:r>
+          </a:p>
+        </p:txBody>
+      </p:sp>
+      <p:sp>
+        <p:nvSpPr>
+          <p:cNvPr id="4" name="TextBox 3"/>
           <p:cNvSpPr txBox="1"/>
           <p:nvPr/>
         </p:nvSpPr>
         <p:spPr>
           <a:xfrm>
-            <a:off x="457200" y="1280160"/>
-            <a:ext cx="11247120" cy="1892826"/>
+            <a:off x="7178040" y="1371600"/>
+            <a:ext cx="4553712" cy="2077492"/>
           </a:xfrm>
           <a:prstGeom prst="rect">
             <a:avLst/>
@@ -3382,10 +3384,33 @@
             </a:pPr>
             <a:r>
               <a:rPr sz="1300" dirty="0">
-                <a:latin typeface="Arial" panose="020B0604020202020204" pitchFamily="34" charset="0"/>
-                <a:cs typeface="Arial" panose="020B0604020202020204" pitchFamily="34" charset="0"/>
-              </a:rPr>
-              <a:t>▪ By weight, aquatic foods are a modest part of the North Maluku diet: about 100 g per person per day, or 9 to 15% of food consumed, remarkably consistent across all ten districts.</a:t>
+                <a:latin typeface="Arial"/>
+              </a:rPr>
+              <a:t>▪ Energy, protein, </a:t>
+            </a:r>
+            <a:r>
+              <a:rPr lang="en-ID" sz="1300" dirty="0">
+                <a:latin typeface="Arial"/>
+              </a:rPr>
+              <a:t>fat,</a:t>
+            </a:r>
+            <a:r>
+              <a:rPr sz="1300" dirty="0">
+                <a:latin typeface="Arial"/>
+              </a:rPr>
+              <a:t> and carbohydrate are complete </a:t>
+            </a:r>
+            <a:r>
+              <a:rPr lang="en-ID" sz="1300" dirty="0">
+                <a:latin typeface="Arial"/>
+              </a:rPr>
+              <a:t>in</a:t>
+            </a:r>
+            <a:r>
+              <a:rPr sz="1300" dirty="0">
+                <a:latin typeface="Arial"/>
+              </a:rPr>
+              <a:t> every record.</a:t>
             </a:r>
           </a:p>
           <a:p>
@@ -3396,17 +3421,9 @@
             </a:pPr>
             <a:r>
               <a:rPr sz="1300" dirty="0">
-                <a:latin typeface="Arial" panose="020B0604020202020204" pitchFamily="34" charset="0"/>
-                <a:cs typeface="Arial" panose="020B0604020202020204" pitchFamily="34" charset="0"/>
-              </a:rPr>
-              <a:t>▪ </a:t>
-            </a:r>
-            <a:r>
-              <a:rPr lang="en-ID" sz="1300" dirty="0">
-                <a:latin typeface="Arial" panose="020B0604020202020204" pitchFamily="34" charset="0"/>
-                <a:cs typeface="Arial" panose="020B0604020202020204" pitchFamily="34" charset="0"/>
-              </a:rPr>
-              <a:t>By nutrition, aquatic foods contribute far more than their share of food weight: about 40% of niacin intake, a quarter of zinc, and 15% of iron.</a:t>
+                <a:latin typeface="Arial"/>
+              </a:rPr>
+              <a:t>▪ Retinol is missing in 36% of records and copper in 10%. The other minerals and vitamins are missing in 2 to 9%.</a:t>
             </a:r>
           </a:p>
           <a:p>
@@ -3417,66 +3434,9 @@
             </a:pPr>
             <a:r>
               <a:rPr sz="1300" dirty="0">
-                <a:latin typeface="Arial" panose="020B0604020202020204" pitchFamily="34" charset="0"/>
-                <a:cs typeface="Arial" panose="020B0604020202020204" pitchFamily="34" charset="0"/>
-              </a:rPr>
-              <a:t>▪ That contribution rests almost entirely on wild capture fisheries, led by the tuna group (</a:t>
-            </a:r>
-            <a:r>
-              <a:rPr sz="1300" dirty="0" err="1">
-                <a:latin typeface="Arial" panose="020B0604020202020204" pitchFamily="34" charset="0"/>
-                <a:cs typeface="Arial" panose="020B0604020202020204" pitchFamily="34" charset="0"/>
-              </a:rPr>
-              <a:t>tongkol</a:t>
-            </a:r>
-            <a:r>
-              <a:rPr sz="1300" dirty="0">
-                <a:latin typeface="Arial" panose="020B0604020202020204" pitchFamily="34" charset="0"/>
-                <a:cs typeface="Arial" panose="020B0604020202020204" pitchFamily="34" charset="0"/>
-              </a:rPr>
-              <a:t>, tuna, </a:t>
-            </a:r>
-            <a:r>
-              <a:rPr sz="1300" dirty="0" err="1">
-                <a:latin typeface="Arial" panose="020B0604020202020204" pitchFamily="34" charset="0"/>
-                <a:cs typeface="Arial" panose="020B0604020202020204" pitchFamily="34" charset="0"/>
-              </a:rPr>
-              <a:t>cakalang</a:t>
-            </a:r>
-            <a:r>
-              <a:rPr sz="1300" dirty="0">
-                <a:latin typeface="Arial" panose="020B0604020202020204" pitchFamily="34" charset="0"/>
-                <a:cs typeface="Arial" panose="020B0604020202020204" pitchFamily="34" charset="0"/>
-              </a:rPr>
-              <a:t>)</a:t>
-            </a:r>
-            <a:r>
-              <a:rPr lang="en-US" sz="1300" dirty="0">
-                <a:latin typeface="Arial" panose="020B0604020202020204" pitchFamily="34" charset="0"/>
-                <a:cs typeface="Arial" panose="020B0604020202020204" pitchFamily="34" charset="0"/>
-              </a:rPr>
-              <a:t>, meanwhile </a:t>
-            </a:r>
-            <a:r>
-              <a:rPr sz="1300" dirty="0">
-                <a:latin typeface="Arial" panose="020B0604020202020204" pitchFamily="34" charset="0"/>
-                <a:cs typeface="Arial" panose="020B0604020202020204" pitchFamily="34" charset="0"/>
-              </a:rPr>
-              <a:t>farmed fish is </a:t>
-            </a:r>
-            <a:r>
-              <a:rPr lang="en-US" sz="1300" dirty="0">
-                <a:latin typeface="Arial" panose="020B0604020202020204" pitchFamily="34" charset="0"/>
-                <a:cs typeface="Arial" panose="020B0604020202020204" pitchFamily="34" charset="0"/>
-              </a:rPr>
-              <a:t>almost </a:t>
-            </a:r>
-            <a:r>
-              <a:rPr sz="1300" dirty="0">
-                <a:latin typeface="Arial" panose="020B0604020202020204" pitchFamily="34" charset="0"/>
-                <a:cs typeface="Arial" panose="020B0604020202020204" pitchFamily="34" charset="0"/>
-              </a:rPr>
-              <a:t>negligible in the province's diet.</a:t>
+                <a:latin typeface="Arial"/>
+              </a:rPr>
+              <a:t>▪ DHA+EPA is missing in 80% of records because only fish and a few prepared foods carry a value.</a:t>
             </a:r>
           </a:p>
           <a:p>
@@ -3487,24 +3447,345 @@
             </a:pPr>
             <a:r>
               <a:rPr sz="1300" dirty="0">
-                <a:latin typeface="Arial" panose="020B0604020202020204" pitchFamily="34" charset="0"/>
-                <a:cs typeface="Arial" panose="020B0604020202020204" pitchFamily="34" charset="0"/>
-              </a:rPr>
-              <a:t>▪ The adequacy gaps are mineral gaps: iron (67% of requirement) and zinc (76%) fall short everywhere, while niacin exceed requirements, which makes fish central to </a:t>
-            </a:r>
-            <a:r>
-              <a:rPr lang="en-US" sz="1300" dirty="0">
-                <a:latin typeface="Arial" panose="020B0604020202020204" pitchFamily="34" charset="0"/>
-                <a:cs typeface="Arial" panose="020B0604020202020204" pitchFamily="34" charset="0"/>
-              </a:rPr>
-              <a:t>their diets</a:t>
-            </a:r>
+                <a:latin typeface="Arial"/>
+              </a:rPr>
+              <a:t>▪ A missing value counts as zero in the intake, so these nutrients are underestimated.</a:t>
+            </a:r>
+          </a:p>
+        </p:txBody>
+      </p:sp>
+      <p:pic>
+        <p:nvPicPr>
+          <p:cNvPr id="5" name="Picture 4" descr="consumption_missing_by_nutrient.png"/>
+          <p:cNvPicPr>
+            <a:picLocks noChangeAspect="1"/>
+          </p:cNvPicPr>
+          <p:nvPr/>
+        </p:nvPicPr>
+        <p:blipFill>
+          <a:blip r:embed="rId2"/>
+          <a:stretch>
+            <a:fillRect/>
+          </a:stretch>
+        </p:blipFill>
+        <p:spPr>
+          <a:xfrm>
+            <a:off x="457200" y="1188720"/>
+            <a:ext cx="6309360" cy="5520690"/>
+          </a:xfrm>
+          <a:prstGeom prst="rect">
+            <a:avLst/>
+          </a:prstGeom>
+        </p:spPr>
+      </p:pic>
+    </p:spTree>
+  </p:cSld>
+  <p:clrMapOvr>
+    <a:masterClrMapping/>
+  </p:clrMapOvr>
+</p:sld>
+</file>
+
+<file path=ppt/slides/slide11.xml><?xml version="1.0" encoding="utf-8"?>
+<p:sld xmlns:a="http://schemas.openxmlformats.org/drawingml/2006/main" xmlns:r="http://schemas.openxmlformats.org/officeDocument/2006/relationships" xmlns:p="http://schemas.openxmlformats.org/presentationml/2006/main">
+  <p:cSld>
+    <p:spTree>
+      <p:nvGrpSpPr>
+        <p:cNvPr id="1" name=""/>
+        <p:cNvGrpSpPr/>
+        <p:nvPr/>
+      </p:nvGrpSpPr>
+      <p:grpSpPr>
+        <a:xfrm>
+          <a:off x="0" y="0"/>
+          <a:ext cx="0" cy="0"/>
+          <a:chOff x="0" y="0"/>
+          <a:chExt cx="0" cy="0"/>
+        </a:xfrm>
+      </p:grpSpPr>
+      <p:sp>
+        <p:nvSpPr>
+          <p:cNvPr id="2" name="TextBox 1"/>
+          <p:cNvSpPr txBox="1"/>
+          <p:nvPr/>
+        </p:nvSpPr>
+        <p:spPr>
+          <a:xfrm>
+            <a:off x="457200" y="292608"/>
+            <a:ext cx="11247120" cy="461665"/>
+          </a:xfrm>
+          <a:prstGeom prst="rect">
+            <a:avLst/>
+          </a:prstGeom>
+          <a:noFill/>
+        </p:spPr>
+        <p:txBody>
+          <a:bodyPr wrap="square">
+            <a:spAutoFit/>
+          </a:bodyPr>
+          <a:lstStyle/>
+          <a:p>
+            <a:pPr>
+              <a:spcAft>
+                <a:spcPts val="600"/>
+              </a:spcAft>
+            </a:pPr>
+            <a:r>
+              <a:rPr sz="2400" b="1" dirty="0">
+                <a:latin typeface="Arial"/>
+              </a:rPr>
+              <a:t>Data Quality: Missing-Data Patterns</a:t>
+            </a:r>
+          </a:p>
+        </p:txBody>
+      </p:sp>
+      <p:sp>
+        <p:nvSpPr>
+          <p:cNvPr id="4" name="TextBox 3"/>
+          <p:cNvSpPr txBox="1"/>
+          <p:nvPr/>
+        </p:nvSpPr>
+        <p:spPr>
+          <a:xfrm>
+            <a:off x="9762564" y="927492"/>
+            <a:ext cx="2268071" cy="3077766"/>
+          </a:xfrm>
+          <a:prstGeom prst="rect">
+            <a:avLst/>
+          </a:prstGeom>
+          <a:noFill/>
+        </p:spPr>
+        <p:txBody>
+          <a:bodyPr wrap="square">
+            <a:spAutoFit/>
+          </a:bodyPr>
+          <a:lstStyle/>
+          <a:p>
+            <a:pPr>
+              <a:spcAft>
+                <a:spcPts val="1000"/>
+              </a:spcAft>
+            </a:pPr>
+            <a:r>
+              <a:rPr sz="1300" dirty="0">
+                <a:latin typeface="Arial"/>
+              </a:rPr>
+              <a:t>▪ Each bar is one missing-data pattern: a set of nutrients that are blank in the same records.</a:t>
+            </a:r>
+          </a:p>
+          <a:p>
+            <a:pPr>
+              <a:spcAft>
+                <a:spcPts val="1000"/>
+              </a:spcAft>
+            </a:pPr>
+            <a:r>
+              <a:rPr sz="1300" dirty="0">
+                <a:latin typeface="Arial"/>
+              </a:rPr>
+              <a:t>▪ 62,257 records lack only DHA+EPA. 38,746 lack DHA+EPA and retinol.</a:t>
+            </a:r>
+          </a:p>
+          <a:p>
+            <a:pPr>
+              <a:spcAft>
+                <a:spcPts val="1000"/>
+              </a:spcAft>
+            </a:pPr>
+            <a:r>
+              <a:rPr sz="1300" dirty="0">
+                <a:latin typeface="Arial"/>
+              </a:rPr>
+              <a:t>▪ 6,934 records lack every vitamin and most minerals. These are three gap-filling items (coffee, MSG, packaged bumbu) built from product labels, which declare few nutrients.</a:t>
+            </a:r>
+          </a:p>
+          <a:p>
+            <a:pPr>
+              <a:spcAft>
+                <a:spcPts val="1000"/>
+              </a:spcAft>
+            </a:pPr>
+            <a:r>
+              <a:rPr sz="1300" dirty="0">
+                <a:latin typeface="Arial"/>
+              </a:rPr>
+              <a:t>▪ No record lacks energy, protein, </a:t>
+            </a:r>
+            <a:r>
+              <a:rPr lang="en-ID" sz="1300" dirty="0">
+                <a:latin typeface="Arial"/>
+              </a:rPr>
+              <a:t>fat,</a:t>
+            </a:r>
+            <a:r>
+              <a:rPr sz="1300" dirty="0">
+                <a:latin typeface="Arial"/>
+              </a:rPr>
+              <a:t> or carbohydrate.</a:t>
+            </a:r>
+          </a:p>
+        </p:txBody>
+      </p:sp>
+      <p:pic>
+        <p:nvPicPr>
+          <p:cNvPr id="5" name="Picture 4" descr="image.png"/>
+          <p:cNvPicPr>
+            <a:picLocks noChangeAspect="1"/>
+          </p:cNvPicPr>
+          <p:nvPr/>
+        </p:nvPicPr>
+        <p:blipFill>
+          <a:blip r:embed="rId2"/>
+          <a:stretch>
+            <a:fillRect/>
+          </a:stretch>
+        </p:blipFill>
+        <p:spPr>
+          <a:xfrm>
+            <a:off x="681317" y="927492"/>
+            <a:ext cx="9081247" cy="4885764"/>
+          </a:xfrm>
+          <a:prstGeom prst="rect">
+            <a:avLst/>
+          </a:prstGeom>
+        </p:spPr>
+      </p:pic>
+    </p:spTree>
+  </p:cSld>
+  <p:clrMapOvr>
+    <a:masterClrMapping/>
+  </p:clrMapOvr>
+</p:sld>
+</file>
+
+<file path=ppt/slides/slide12.xml><?xml version="1.0" encoding="utf-8"?>
+<p:sld xmlns:a="http://schemas.openxmlformats.org/drawingml/2006/main" xmlns:r="http://schemas.openxmlformats.org/officeDocument/2006/relationships" xmlns:p="http://schemas.openxmlformats.org/presentationml/2006/main">
+  <p:cSld>
+    <p:spTree>
+      <p:nvGrpSpPr>
+        <p:cNvPr id="1" name=""/>
+        <p:cNvGrpSpPr/>
+        <p:nvPr/>
+      </p:nvGrpSpPr>
+      <p:grpSpPr>
+        <a:xfrm>
+          <a:off x="0" y="0"/>
+          <a:ext cx="0" cy="0"/>
+          <a:chOff x="0" y="0"/>
+          <a:chExt cx="0" cy="0"/>
+        </a:xfrm>
+      </p:grpSpPr>
+      <p:sp>
+        <p:nvSpPr>
+          <p:cNvPr id="2" name="TextBox 1"/>
+          <p:cNvSpPr txBox="1"/>
+          <p:nvPr/>
+        </p:nvSpPr>
+        <p:spPr>
+          <a:xfrm>
+            <a:off x="457200" y="292608"/>
+            <a:ext cx="11247120" cy="640080"/>
+          </a:xfrm>
+          <a:prstGeom prst="rect">
+            <a:avLst/>
+          </a:prstGeom>
+          <a:noFill/>
+        </p:spPr>
+        <p:txBody>
+          <a:bodyPr wrap="square">
+            <a:spAutoFit/>
+          </a:bodyPr>
+          <a:lstStyle/>
+          <a:p>
+            <a:pPr>
+              <a:spcAft>
+                <a:spcPts val="600"/>
+              </a:spcAft>
+            </a:pPr>
+            <a:r>
+              <a:rPr sz="2400" b="1">
+                <a:latin typeface="Arial"/>
+              </a:rPr>
+              <a:t>Summary: What Aquatic Foods Contribute</a:t>
+            </a:r>
+          </a:p>
+        </p:txBody>
+      </p:sp>
+      <p:sp>
+        <p:nvSpPr>
+          <p:cNvPr id="3" name="TextBox 2"/>
+          <p:cNvSpPr txBox="1"/>
+          <p:nvPr/>
+        </p:nvSpPr>
+        <p:spPr>
+          <a:xfrm>
+            <a:off x="457200" y="1280160"/>
+            <a:ext cx="11247120" cy="1892826"/>
+          </a:xfrm>
+          <a:prstGeom prst="rect">
+            <a:avLst/>
+          </a:prstGeom>
+          <a:noFill/>
+        </p:spPr>
+        <p:txBody>
+          <a:bodyPr wrap="square">
+            <a:spAutoFit/>
+          </a:bodyPr>
+          <a:lstStyle/>
+          <a:p>
+            <a:pPr>
+              <a:spcAft>
+                <a:spcPts val="1000"/>
+              </a:spcAft>
+            </a:pPr>
             <a:r>
               <a:rPr sz="1300" dirty="0">
                 <a:latin typeface="Arial" panose="020B0604020202020204" pitchFamily="34" charset="0"/>
                 <a:cs typeface="Arial" panose="020B0604020202020204" pitchFamily="34" charset="0"/>
               </a:rPr>
-              <a:t>.</a:t>
+              <a:t>▪ Aquatic foods are about 100 g per person per day, 9 to 15% of food weight, in all ten districts.</a:t>
+            </a:r>
+          </a:p>
+          <a:p>
+            <a:pPr>
+              <a:spcAft>
+                <a:spcPts val="1000"/>
+              </a:spcAft>
+            </a:pPr>
+            <a:r>
+              <a:rPr sz="1300" dirty="0">
+                <a:latin typeface="Arial" panose="020B0604020202020204" pitchFamily="34" charset="0"/>
+                <a:cs typeface="Arial" panose="020B0604020202020204" pitchFamily="34" charset="0"/>
+              </a:rPr>
+              <a:t>▪ Aquatic foods provide 22% of protein, 24% of niacin, 16% of zinc and 7% of iron intake.</a:t>
+            </a:r>
+          </a:p>
+          <a:p>
+            <a:pPr>
+              <a:spcAft>
+                <a:spcPts val="1000"/>
+              </a:spcAft>
+            </a:pPr>
+            <a:r>
+              <a:rPr sz="1300" dirty="0">
+                <a:latin typeface="Arial" panose="020B0604020202020204" pitchFamily="34" charset="0"/>
+                <a:cs typeface="Arial" panose="020B0604020202020204" pitchFamily="34" charset="0"/>
+              </a:rPr>
+              <a:t>▪ Capture fisheries supply 77% of aquatic food, led by the Scombridae group. Aquaculture supplies 1%.</a:t>
+            </a:r>
+          </a:p>
+          <a:p>
+            <a:pPr>
+              <a:spcAft>
+                <a:spcPts val="1000"/>
+              </a:spcAft>
+            </a:pPr>
+            <a:r>
+              <a:rPr sz="1300" dirty="0">
+                <a:latin typeface="Arial" panose="020B0604020202020204" pitchFamily="34" charset="0"/>
+                <a:cs typeface="Arial" panose="020B0604020202020204" pitchFamily="34" charset="0"/>
+              </a:rPr>
+              <a:t>▪ Iron (61% of requirement) and zinc (67%) are below the requirement in every district. Niacin exceeds it.</a:t>
             </a:r>
           </a:p>
         </p:txBody>
@@ -3570,9 +3851,84 @@
           </a:p>
         </p:txBody>
       </p:sp>
+      <p:sp>
+        <p:nvSpPr>
+          <p:cNvPr id="4" name="TextBox 3"/>
+          <p:cNvSpPr txBox="1"/>
+          <p:nvPr/>
+        </p:nvSpPr>
+        <p:spPr>
+          <a:xfrm>
+            <a:off x="7788924" y="1993392"/>
+            <a:ext cx="3945875" cy="2477601"/>
+          </a:xfrm>
+          <a:prstGeom prst="rect">
+            <a:avLst/>
+          </a:prstGeom>
+          <a:noFill/>
+        </p:spPr>
+        <p:txBody>
+          <a:bodyPr wrap="square">
+            <a:spAutoFit/>
+          </a:bodyPr>
+          <a:lstStyle/>
+          <a:p>
+            <a:pPr>
+              <a:spcAft>
+                <a:spcPts val="1000"/>
+              </a:spcAft>
+            </a:pPr>
+            <a:r>
+              <a:rPr lang="en-ID" sz="1300" dirty="0">
+                <a:latin typeface="Arial"/>
+              </a:rPr>
+              <a:t>▪ Daily food consumption is 770 to 930 g per person across the ten districts.</a:t>
+            </a:r>
+          </a:p>
+          <a:p>
+            <a:pPr>
+              <a:spcAft>
+                <a:spcPts val="1000"/>
+              </a:spcAft>
+            </a:pPr>
+            <a:r>
+              <a:rPr lang="en-ID" sz="1300" dirty="0">
+                <a:latin typeface="Arial"/>
+              </a:rPr>
+              <a:t>▪ Aquatic foods add 80 to 130 g per person per day in every district.</a:t>
+            </a:r>
+          </a:p>
+          <a:p>
+            <a:pPr>
+              <a:spcAft>
+                <a:spcPts val="1000"/>
+              </a:spcAft>
+            </a:pPr>
+            <a:r>
+              <a:rPr lang="en-ID" sz="1300" dirty="0">
+                <a:latin typeface="Arial"/>
+              </a:rPr>
+              <a:t>▪ The weighted provincial fish figure is 101.6 g per person per day, match to the BPS March 2020 report.</a:t>
+            </a:r>
+          </a:p>
+          <a:p>
+            <a:pPr>
+              <a:spcAft>
+                <a:spcPts val="1000"/>
+              </a:spcAft>
+            </a:pPr>
+            <a:r>
+              <a:rPr lang="en-ID" sz="1300" dirty="0">
+                <a:latin typeface="Arial"/>
+              </a:rPr>
+              <a:t>▪ Aquatic foods are 9 to 15% of food weight: highest in Kepulauan Sula, Halmahera Selatan, and Halmahera Tengah, lowest in Pulau Morotai.</a:t>
+            </a:r>
+          </a:p>
+        </p:txBody>
+      </p:sp>
       <p:pic>
         <p:nvPicPr>
-          <p:cNvPr id="3" name="Picture 2" descr="consumption_capita_district.png"/>
+          <p:cNvPr id="5" name="Picture 4" descr="consumption_capita_district.png"/>
           <p:cNvPicPr>
             <a:picLocks noChangeAspect="1"/>
           </p:cNvPicPr>
@@ -3594,124 +3950,6 @@
           </a:prstGeom>
         </p:spPr>
       </p:pic>
-      <p:sp>
-        <p:nvSpPr>
-          <p:cNvPr id="4" name="TextBox 3"/>
-          <p:cNvSpPr txBox="1"/>
-          <p:nvPr/>
-        </p:nvSpPr>
-        <p:spPr>
-          <a:xfrm>
-            <a:off x="7788924" y="1993392"/>
-            <a:ext cx="3945875" cy="2893100"/>
-          </a:xfrm>
-          <a:prstGeom prst="rect">
-            <a:avLst/>
-          </a:prstGeom>
-          <a:noFill/>
-        </p:spPr>
-        <p:txBody>
-          <a:bodyPr wrap="square">
-            <a:spAutoFit/>
-          </a:bodyPr>
-          <a:lstStyle/>
-          <a:p>
-            <a:pPr>
-              <a:spcAft>
-                <a:spcPts val="1000"/>
-              </a:spcAft>
-            </a:pPr>
-            <a:r>
-              <a:rPr lang="en-ID" sz="1300" dirty="0">
-                <a:latin typeface="Arial"/>
-              </a:rPr>
-              <a:t>▪ A person in North Maluku consumes about 770 to 930 g of food per day, a narrow range: no district eats dramatically more than another.</a:t>
-            </a:r>
-          </a:p>
-          <a:p>
-            <a:pPr>
-              <a:spcAft>
-                <a:spcPts val="1000"/>
-              </a:spcAft>
-            </a:pPr>
-            <a:r>
-              <a:rPr lang="en-ID" sz="1300" dirty="0">
-                <a:latin typeface="Arial"/>
-              </a:rPr>
-              <a:t>▪ Aquatic foods contribute a similar amount everywhere, about 80 to 130 g per person per day.</a:t>
-            </a:r>
-          </a:p>
-          <a:p>
-            <a:pPr>
-              <a:spcAft>
-                <a:spcPts val="1000"/>
-              </a:spcAft>
-            </a:pPr>
-            <a:r>
-              <a:rPr lang="en-ID" sz="1400" dirty="0">
-                <a:latin typeface="Arial"/>
-              </a:rPr>
-              <a:t>▪ </a:t>
-            </a:r>
-            <a:r>
-              <a:rPr lang="en-ID" sz="1300" dirty="0">
-                <a:latin typeface="Arial"/>
-              </a:rPr>
-              <a:t>The weighted fish figure, 101.6 g per capita per day, matches the published </a:t>
-            </a:r>
-            <a:r>
-              <a:rPr lang="en-ID" sz="1300" dirty="0">
-                <a:latin typeface="Arial"/>
-                <a:hlinkClick r:id="rId3"/>
-              </a:rPr>
-              <a:t>BPS March 2020 </a:t>
-            </a:r>
-            <a:r>
-              <a:rPr lang="en-ID" sz="1300" dirty="0">
-                <a:latin typeface="Arial"/>
-              </a:rPr>
-              <a:t>report for North Maluku.</a:t>
-            </a:r>
-          </a:p>
-          <a:p>
-            <a:pPr>
-              <a:spcAft>
-                <a:spcPts val="1000"/>
-              </a:spcAft>
-            </a:pPr>
-            <a:r>
-              <a:rPr lang="en-ID" sz="1300" dirty="0">
-                <a:latin typeface="Arial"/>
-              </a:rPr>
-              <a:t>▪ Aquatic share of the diet is 9 to 15% of food weight, highest in </a:t>
-            </a:r>
-            <a:r>
-              <a:rPr lang="en-ID" sz="1300" dirty="0" err="1">
-                <a:latin typeface="Arial"/>
-              </a:rPr>
-              <a:t>Kepulauan</a:t>
-            </a:r>
-            <a:r>
-              <a:rPr lang="en-ID" sz="1300" dirty="0">
-                <a:latin typeface="Arial"/>
-              </a:rPr>
-              <a:t> Sula, Halmahera Selatan and Halmahera Tengah, lowest in Pulau </a:t>
-            </a:r>
-            <a:r>
-              <a:rPr lang="en-ID" sz="1300" dirty="0" err="1">
-                <a:latin typeface="Arial"/>
-              </a:rPr>
-              <a:t>Morotai</a:t>
-            </a:r>
-            <a:r>
-              <a:rPr lang="en-ID" sz="1300" dirty="0">
-                <a:latin typeface="Arial"/>
-              </a:rPr>
-              <a:t>.</a:t>
-            </a:r>
-          </a:p>
-        </p:txBody>
-      </p:sp>
     </p:spTree>
   </p:cSld>
   <p:clrMapOvr>
@@ -3768,9 +4006,71 @@
           </a:p>
         </p:txBody>
       </p:sp>
+      <p:sp>
+        <p:nvSpPr>
+          <p:cNvPr id="4" name="TextBox 3"/>
+          <p:cNvSpPr txBox="1"/>
+          <p:nvPr/>
+        </p:nvSpPr>
+        <p:spPr>
+          <a:xfrm>
+            <a:off x="7178040" y="1371600"/>
+            <a:ext cx="4553712" cy="4572000"/>
+          </a:xfrm>
+          <a:prstGeom prst="rect">
+            <a:avLst/>
+          </a:prstGeom>
+          <a:noFill/>
+        </p:spPr>
+        <p:txBody>
+          <a:bodyPr wrap="square">
+            <a:spAutoFit/>
+          </a:bodyPr>
+          <a:lstStyle/>
+          <a:p>
+            <a:pPr>
+              <a:spcAft>
+                <a:spcPts val="1000"/>
+              </a:spcAft>
+            </a:pPr>
+            <a:r>
+              <a:rPr sz="1300">
+                <a:latin typeface="Arial"/>
+              </a:rPr>
+              <a:t>▪ Urban and rural fish consumption differ by less than 5 g per day in Halmahera Tengah, Halmahera Utara, Kota Ternate and Kota Tidore Kepulauan.</a:t>
+            </a:r>
+          </a:p>
+          <a:p>
+            <a:pPr>
+              <a:spcAft>
+                <a:spcPts val="1000"/>
+              </a:spcAft>
+            </a:pPr>
+            <a:r>
+              <a:rPr sz="1300">
+                <a:latin typeface="Arial"/>
+              </a:rPr>
+              <a:t>▪ Rural consumption is higher in Halmahera Timur (108 vs 64 g). Urban consumption is higher in Pulau Morotai (116 vs 76 g) and Halmahera Selatan (150 vs 113 g).</a:t>
+            </a:r>
+          </a:p>
+          <a:p>
+            <a:pPr>
+              <a:spcAft>
+                <a:spcPts val="1000"/>
+              </a:spcAft>
+            </a:pPr>
+            <a:r>
+              <a:rPr sz="1300">
+                <a:latin typeface="Arial"/>
+              </a:rPr>
+              <a:t>▪ Pulau Taliabu has a rural sample only and the highest fish consumption, 127 g per person per day.</a:t>
+            </a:r>
+          </a:p>
+        </p:txBody>
+      </p:sp>
       <p:pic>
         <p:nvPicPr>
-          <p:cNvPr id="3" name="Picture 2" descr="fish_consumption_area.png"/>
+          <p:cNvPr id="5" name="Picture 4" descr="image.png"/>
           <p:cNvPicPr>
             <a:picLocks noChangeAspect="1"/>
           </p:cNvPicPr>
@@ -3792,68 +4092,6 @@
           </a:prstGeom>
         </p:spPr>
       </p:pic>
-      <p:sp>
-        <p:nvSpPr>
-          <p:cNvPr id="4" name="TextBox 3"/>
-          <p:cNvSpPr txBox="1"/>
-          <p:nvPr/>
-        </p:nvSpPr>
-        <p:spPr>
-          <a:xfrm>
-            <a:off x="7178040" y="1371600"/>
-            <a:ext cx="4553712" cy="4572000"/>
-          </a:xfrm>
-          <a:prstGeom prst="rect">
-            <a:avLst/>
-          </a:prstGeom>
-          <a:noFill/>
-        </p:spPr>
-        <p:txBody>
-          <a:bodyPr wrap="square">
-            <a:spAutoFit/>
-          </a:bodyPr>
-          <a:lstStyle/>
-          <a:p>
-            <a:pPr>
-              <a:spcAft>
-                <a:spcPts val="1000"/>
-              </a:spcAft>
-            </a:pPr>
-            <a:r>
-              <a:rPr sz="1300">
-                <a:latin typeface="Arial"/>
-              </a:rPr>
-              <a:t>▪ Urban and rural fish consumption are close in most districts: in Halmahera Utara, Kota Ternate and Halmahera Tengah the two are nearly equal.</a:t>
-            </a:r>
-          </a:p>
-          <a:p>
-            <a:pPr>
-              <a:spcAft>
-                <a:spcPts val="1000"/>
-              </a:spcAft>
-            </a:pPr>
-            <a:r>
-              <a:rPr sz="1300">
-                <a:latin typeface="Arial"/>
-              </a:rPr>
-              <a:t>▪ The largest gaps run in both directions: rural consumption is higher in Halmahera Timur (108 vs 64 g per day), while urban is higher in Pulau Morotai and Halmahera Selatan by about 35 to 40 g.</a:t>
-            </a:r>
-          </a:p>
-          <a:p>
-            <a:pPr>
-              <a:spcAft>
-                <a:spcPts val="1000"/>
-              </a:spcAft>
-            </a:pPr>
-            <a:r>
-              <a:rPr sz="1300">
-                <a:latin typeface="Arial"/>
-              </a:rPr>
-              <a:t>▪ Pulau Taliabu is entirely rural and has the highest fish consumption in the province, about 127 g per person per day.</a:t>
-            </a:r>
-          </a:p>
-        </p:txBody>
-      </p:sp>
     </p:spTree>
   </p:cSld>
   <p:clrMapOvr>
@@ -3905,14 +4143,112 @@
               <a:rPr sz="2400" b="1">
                 <a:latin typeface="Arial"/>
               </a:rPr>
-              <a:t>Aquatic Consumption by District and Acquisition</a:t>
+              <a:t>Subsistence Share of Consumption: Aquatic and Non-Aquatic Foods</a:t>
+            </a:r>
+          </a:p>
+        </p:txBody>
+      </p:sp>
+      <p:sp>
+        <p:nvSpPr>
+          <p:cNvPr id="4" name="TextBox 3"/>
+          <p:cNvSpPr txBox="1"/>
+          <p:nvPr/>
+        </p:nvSpPr>
+        <p:spPr>
+          <a:xfrm>
+            <a:off x="7178040" y="1371600"/>
+            <a:ext cx="4553712" cy="1749197"/>
+          </a:xfrm>
+          <a:prstGeom prst="rect">
+            <a:avLst/>
+          </a:prstGeom>
+          <a:noFill/>
+        </p:spPr>
+        <p:txBody>
+          <a:bodyPr wrap="square">
+            <a:spAutoFit/>
+          </a:bodyPr>
+          <a:lstStyle/>
+          <a:p>
+            <a:pPr>
+              <a:spcAft>
+                <a:spcPts val="1000"/>
+              </a:spcAft>
+            </a:pPr>
+            <a:r>
+              <a:rPr sz="1300" dirty="0">
+                <a:latin typeface="Arial"/>
+              </a:rPr>
+              <a:t>▪ Province-wide, 17% of aquatic food and 27% of non-aquatic food </a:t>
+            </a:r>
+            <a:r>
+              <a:rPr lang="en-ID" sz="1300" dirty="0">
+                <a:latin typeface="Arial"/>
+              </a:rPr>
+              <a:t>come</a:t>
+            </a:r>
+            <a:r>
+              <a:rPr sz="1300" dirty="0">
+                <a:latin typeface="Arial"/>
+              </a:rPr>
+              <a:t> from subsistence.</a:t>
+            </a:r>
+          </a:p>
+          <a:p>
+            <a:pPr>
+              <a:spcAft>
+                <a:spcPts val="1000"/>
+              </a:spcAft>
+            </a:pPr>
+            <a:r>
+              <a:rPr sz="1300" dirty="0">
+                <a:latin typeface="Arial"/>
+              </a:rPr>
+              <a:t>▪ Non-aquatic food has </a:t>
+            </a:r>
+            <a:r>
+              <a:rPr lang="en-ID" sz="1300" dirty="0">
+                <a:latin typeface="Arial"/>
+              </a:rPr>
+              <a:t>a</a:t>
+            </a:r>
+            <a:r>
+              <a:rPr sz="1300" dirty="0">
+                <a:latin typeface="Arial"/>
+              </a:rPr>
+              <a:t> higher subsistence share in nine districts. Kepulauan Sula is the exception: 20% for aquatic food and 13% for non-aquatic food.</a:t>
+            </a:r>
+          </a:p>
+          <a:p>
+            <a:pPr>
+              <a:spcAft>
+                <a:spcPts val="1000"/>
+              </a:spcAft>
+            </a:pPr>
+            <a:r>
+              <a:rPr sz="1300" dirty="0">
+                <a:latin typeface="Arial"/>
+              </a:rPr>
+              <a:t>▪ Pulau Morotai has the highest </a:t>
+            </a:r>
+            <a:r>
+              <a:rPr lang="en-ID" sz="1300" dirty="0">
+                <a:latin typeface="Arial"/>
+              </a:rPr>
+              <a:t>shares:</a:t>
+            </a:r>
+            <a:r>
+              <a:rPr sz="1300" dirty="0">
+                <a:latin typeface="Arial"/>
+              </a:rPr>
+              <a:t> 33% aquatic and 43% non-aquatic. Kota Ternate has the lowest, 4% and 9%.</a:t>
             </a:r>
           </a:p>
         </p:txBody>
       </p:sp>
       <p:pic>
         <p:nvPicPr>
-          <p:cNvPr id="3" name="Picture 2" descr="fish_consumption_acquisition_district.png"/>
+          <p:cNvPr id="5" name="Picture 4" descr="subsistence_share_district.png"/>
           <p:cNvPicPr>
             <a:picLocks noChangeAspect="1"/>
           </p:cNvPicPr>
@@ -3927,108 +4263,13 @@
         <p:spPr>
           <a:xfrm>
             <a:off x="457200" y="1188720"/>
-            <a:ext cx="6309360" cy="4164177"/>
+            <a:ext cx="6309360" cy="4164178"/>
           </a:xfrm>
           <a:prstGeom prst="rect">
             <a:avLst/>
           </a:prstGeom>
         </p:spPr>
       </p:pic>
-      <p:sp>
-        <p:nvSpPr>
-          <p:cNvPr id="4" name="TextBox 3"/>
-          <p:cNvSpPr txBox="1"/>
-          <p:nvPr/>
-        </p:nvSpPr>
-        <p:spPr>
-          <a:xfrm>
-            <a:off x="7178040" y="1371600"/>
-            <a:ext cx="4553712" cy="1549142"/>
-          </a:xfrm>
-          <a:prstGeom prst="rect">
-            <a:avLst/>
-          </a:prstGeom>
-          <a:noFill/>
-        </p:spPr>
-        <p:txBody>
-          <a:bodyPr wrap="square">
-            <a:spAutoFit/>
-          </a:bodyPr>
-          <a:lstStyle/>
-          <a:p>
-            <a:pPr>
-              <a:spcAft>
-                <a:spcPts val="1000"/>
-              </a:spcAft>
-            </a:pPr>
-            <a:r>
-              <a:rPr sz="1300" dirty="0">
-                <a:latin typeface="Arial"/>
-              </a:rPr>
-              <a:t>▪ Across the province, about 83% of fish is purchased and 17% comes from subsistence</a:t>
-            </a:r>
-            <a:r>
-              <a:rPr lang="en-US" sz="1300" dirty="0">
-                <a:latin typeface="Arial"/>
-              </a:rPr>
-              <a:t>.</a:t>
-            </a:r>
-            <a:endParaRPr sz="1300" dirty="0">
-              <a:latin typeface="Arial"/>
-            </a:endParaRPr>
-          </a:p>
-          <a:p>
-            <a:pPr>
-              <a:spcAft>
-                <a:spcPts val="1000"/>
-              </a:spcAft>
-            </a:pPr>
-            <a:r>
-              <a:rPr sz="1300" dirty="0">
-                <a:latin typeface="Arial"/>
-              </a:rPr>
-              <a:t>▪ The subsistence share is largest in Pulau </a:t>
-            </a:r>
-            <a:r>
-              <a:rPr sz="1300" dirty="0" err="1">
-                <a:latin typeface="Arial"/>
-              </a:rPr>
-              <a:t>Morotai</a:t>
-            </a:r>
-            <a:r>
-              <a:rPr sz="1300" dirty="0">
-                <a:latin typeface="Arial"/>
-              </a:rPr>
-              <a:t>, about a third of its fish, and smallest in Kota Ternate, about 4%.</a:t>
-            </a:r>
-          </a:p>
-          <a:p>
-            <a:pPr>
-              <a:spcAft>
-                <a:spcPts val="1000"/>
-              </a:spcAft>
-            </a:pPr>
-            <a:r>
-              <a:rPr sz="1300" dirty="0">
-                <a:latin typeface="Arial"/>
-              </a:rPr>
-              <a:t>▪ Pulau </a:t>
-            </a:r>
-            <a:r>
-              <a:rPr sz="1300" dirty="0" err="1">
-                <a:latin typeface="Arial"/>
-              </a:rPr>
-              <a:t>Taliabu</a:t>
-            </a:r>
-            <a:r>
-              <a:rPr sz="1300" dirty="0">
-                <a:latin typeface="Arial"/>
-              </a:rPr>
-              <a:t> eats the most fish, and most of it is purchased, about 105 of its 126 g per person per day.</a:t>
-            </a:r>
-          </a:p>
-        </p:txBody>
-      </p:sp>
     </p:spTree>
   </p:cSld>
   <p:clrMapOvr>
@@ -4090,9 +4331,58 @@
           </a:p>
         </p:txBody>
       </p:sp>
+      <p:sp>
+        <p:nvSpPr>
+          <p:cNvPr id="4" name="TextBox 3"/>
+          <p:cNvSpPr txBox="1"/>
+          <p:nvPr/>
+        </p:nvSpPr>
+        <p:spPr>
+          <a:xfrm>
+            <a:off x="7150608" y="2196155"/>
+            <a:ext cx="4553712" cy="1020792"/>
+          </a:xfrm>
+          <a:prstGeom prst="rect">
+            <a:avLst/>
+          </a:prstGeom>
+          <a:noFill/>
+        </p:spPr>
+        <p:txBody>
+          <a:bodyPr wrap="square">
+            <a:spAutoFit/>
+          </a:bodyPr>
+          <a:lstStyle/>
+          <a:p>
+            <a:pPr>
+              <a:spcAft>
+                <a:spcPts val="1000"/>
+              </a:spcAft>
+            </a:pPr>
+            <a:r>
+              <a:rPr sz="1300" dirty="0">
+                <a:latin typeface="Arial"/>
+              </a:rPr>
+              <a:t>▪ Capture fisheries supply 77% of aquatic food weight, 78 g per person per day.</a:t>
+            </a:r>
+          </a:p>
+          <a:p>
+            <a:pPr>
+              <a:spcAft>
+                <a:spcPts val="1000"/>
+              </a:spcAft>
+            </a:pPr>
+            <a:r>
+              <a:rPr sz="1300" dirty="0">
+                <a:latin typeface="Arial"/>
+              </a:rPr>
+              <a:t>▪ Species that come from both aquaculture and capture supply 22%. Aquaculture-only species supply 1%.</a:t>
+            </a:r>
+          </a:p>
+        </p:txBody>
+      </p:sp>
       <p:pic>
         <p:nvPicPr>
-          <p:cNvPr id="3" name="Picture 2" descr="fish_consumption_method_district.png"/>
+          <p:cNvPr id="5" name="Picture 4" descr="image.png"/>
           <p:cNvPicPr>
             <a:picLocks noChangeAspect="1"/>
           </p:cNvPicPr>
@@ -4107,123 +4397,13 @@
         <p:spPr>
           <a:xfrm>
             <a:off x="457200" y="1188720"/>
-            <a:ext cx="6309360" cy="4164177"/>
+            <a:ext cx="6309360" cy="4164178"/>
           </a:xfrm>
           <a:prstGeom prst="rect">
             <a:avLst/>
           </a:prstGeom>
         </p:spPr>
       </p:pic>
-      <p:sp>
-        <p:nvSpPr>
-          <p:cNvPr id="4" name="TextBox 3"/>
-          <p:cNvSpPr txBox="1"/>
-          <p:nvPr/>
-        </p:nvSpPr>
-        <p:spPr>
-          <a:xfrm>
-            <a:off x="7150608" y="2196155"/>
-            <a:ext cx="4553712" cy="1949252"/>
-          </a:xfrm>
-          <a:prstGeom prst="rect">
-            <a:avLst/>
-          </a:prstGeom>
-          <a:noFill/>
-        </p:spPr>
-        <p:txBody>
-          <a:bodyPr wrap="square">
-            <a:spAutoFit/>
-          </a:bodyPr>
-          <a:lstStyle/>
-          <a:p>
-            <a:pPr>
-              <a:spcAft>
-                <a:spcPts val="1000"/>
-              </a:spcAft>
-            </a:pPr>
-            <a:r>
-              <a:rPr sz="1300" dirty="0">
-                <a:latin typeface="Arial"/>
-              </a:rPr>
-              <a:t>▪ Fish </a:t>
-            </a:r>
-            <a:r>
-              <a:rPr lang="en-ID" sz="1300" dirty="0">
-                <a:latin typeface="Arial"/>
-              </a:rPr>
-              <a:t>from wild-capture fisheries in North Maluku</a:t>
-            </a:r>
-            <a:r>
-              <a:rPr sz="1300" dirty="0">
-                <a:latin typeface="Arial"/>
-              </a:rPr>
-              <a:t> supply 77% of aquatic food weight, about 78 g per person per day.</a:t>
-            </a:r>
-          </a:p>
-          <a:p>
-            <a:pPr>
-              <a:spcAft>
-                <a:spcPts val="1000"/>
-              </a:spcAft>
-            </a:pPr>
-            <a:r>
-              <a:rPr sz="1300" dirty="0">
-                <a:latin typeface="Arial"/>
-              </a:rPr>
-              <a:t>▪ Species that come from both farming and wild catch account for 22%; purely </a:t>
-            </a:r>
-            <a:r>
-              <a:rPr lang="en-US" sz="1300" dirty="0">
-                <a:latin typeface="Arial"/>
-              </a:rPr>
-              <a:t>aquaculture</a:t>
-            </a:r>
-            <a:r>
-              <a:rPr sz="1300" dirty="0">
-                <a:latin typeface="Arial"/>
-              </a:rPr>
-              <a:t> species are almost absent (1%).</a:t>
-            </a:r>
-          </a:p>
-          <a:p>
-            <a:pPr>
-              <a:spcAft>
-                <a:spcPts val="1000"/>
-              </a:spcAft>
-            </a:pPr>
-            <a:r>
-              <a:rPr sz="1300" dirty="0">
-                <a:latin typeface="Arial"/>
-              </a:rPr>
-              <a:t>▪ This pattern holds in every district even where total fish consumption is highest, farmed fish plays </a:t>
-            </a:r>
-            <a:r>
-              <a:rPr lang="en-US" sz="1300" dirty="0">
-                <a:latin typeface="Arial"/>
-              </a:rPr>
-              <a:t>less </a:t>
-            </a:r>
-            <a:r>
-              <a:rPr sz="1300" dirty="0">
-                <a:latin typeface="Arial"/>
-              </a:rPr>
-              <a:t>role</a:t>
-            </a:r>
-            <a:r>
-              <a:rPr lang="en-US" sz="1300" dirty="0">
-                <a:latin typeface="Arial"/>
-              </a:rPr>
-              <a:t> in a person's diet</a:t>
-            </a:r>
-            <a:r>
-              <a:rPr sz="1300" dirty="0">
-                <a:latin typeface="Arial"/>
-              </a:rPr>
-              <a:t>.</a:t>
-            </a:r>
-          </a:p>
-        </p:txBody>
-      </p:sp>
     </p:spTree>
   </p:cSld>
   <p:clrMapOvr>
@@ -4297,9 +4477,96 @@
           </a:p>
         </p:txBody>
       </p:sp>
+      <p:sp>
+        <p:nvSpPr>
+          <p:cNvPr id="4" name="TextBox 3"/>
+          <p:cNvSpPr txBox="1"/>
+          <p:nvPr/>
+        </p:nvSpPr>
+        <p:spPr>
+          <a:xfrm>
+            <a:off x="487680" y="5288119"/>
+            <a:ext cx="10914043" cy="1277273"/>
+          </a:xfrm>
+          <a:prstGeom prst="rect">
+            <a:avLst/>
+          </a:prstGeom>
+          <a:noFill/>
+        </p:spPr>
+        <p:txBody>
+          <a:bodyPr wrap="square">
+            <a:spAutoFit/>
+          </a:bodyPr>
+          <a:lstStyle/>
+          <a:p>
+            <a:pPr>
+              <a:spcAft>
+                <a:spcPts val="1000"/>
+              </a:spcAft>
+            </a:pPr>
+            <a:r>
+              <a:rPr sz="1300" dirty="0">
+                <a:latin typeface="Arial"/>
+              </a:rPr>
+              <a:t>▪ The Scombridae group (tongkol, tuna, cakalang) is the largest contributor, 37 g per person per day, about </a:t>
+            </a:r>
+            <a:r>
+              <a:rPr lang="en-ID" sz="1300" dirty="0">
+                <a:latin typeface="Arial"/>
+              </a:rPr>
+              <a:t>one-third</a:t>
+            </a:r>
+            <a:r>
+              <a:rPr sz="1300" dirty="0">
+                <a:latin typeface="Arial"/>
+              </a:rPr>
+              <a:t> of all fish.</a:t>
+            </a:r>
+          </a:p>
+          <a:p>
+            <a:pPr>
+              <a:spcAft>
+                <a:spcPts val="1000"/>
+              </a:spcAft>
+            </a:pPr>
+            <a:r>
+              <a:rPr sz="1300" dirty="0">
+                <a:latin typeface="Arial"/>
+              </a:rPr>
+              <a:t>▪ Other fresh fish (Actinopterygii) follows with 22 g, then Caesio cuning (11 g) and Rastrelliger (10 g).</a:t>
+            </a:r>
+          </a:p>
+          <a:p>
+            <a:pPr>
+              <a:spcAft>
+                <a:spcPts val="1000"/>
+              </a:spcAft>
+            </a:pPr>
+            <a:r>
+              <a:rPr sz="1300" dirty="0">
+                <a:latin typeface="Arial"/>
+              </a:rPr>
+              <a:t>▪ The right panel shows the remaining species, each under 2 g per day.</a:t>
+            </a:r>
+          </a:p>
+          <a:p>
+            <a:pPr>
+              <a:spcAft>
+                <a:spcPts val="1000"/>
+              </a:spcAft>
+            </a:pPr>
+            <a:r>
+              <a:rPr sz="1300" dirty="0">
+                <a:latin typeface="Arial"/>
+              </a:rPr>
+              <a:t>▪ Fresh and preserved forms of a species are combined.</a:t>
+            </a:r>
+          </a:p>
+        </p:txBody>
+      </p:sp>
       <p:pic>
         <p:nvPicPr>
-          <p:cNvPr id="3" name="Picture 2" descr="fish_consumption_sciname_panels.png"/>
+          <p:cNvPr id="5" name="Picture 4" descr="image.png"/>
           <p:cNvPicPr>
             <a:picLocks noChangeAspect="1"/>
           </p:cNvPicPr>
@@ -4314,193 +4581,13 @@
         <p:spPr>
           <a:xfrm>
             <a:off x="1436048" y="932688"/>
-            <a:ext cx="9017306" cy="4355431"/>
+            <a:ext cx="9017306" cy="4251016"/>
           </a:xfrm>
           <a:prstGeom prst="rect">
             <a:avLst/>
           </a:prstGeom>
         </p:spPr>
       </p:pic>
-      <p:sp>
-        <p:nvSpPr>
-          <p:cNvPr id="4" name="TextBox 3"/>
-          <p:cNvSpPr txBox="1"/>
-          <p:nvPr/>
-        </p:nvSpPr>
-        <p:spPr>
-          <a:xfrm>
-            <a:off x="487680" y="5288119"/>
-            <a:ext cx="10914043" cy="1277273"/>
-          </a:xfrm>
-          <a:prstGeom prst="rect">
-            <a:avLst/>
-          </a:prstGeom>
-          <a:noFill/>
-        </p:spPr>
-        <p:txBody>
-          <a:bodyPr wrap="square">
-            <a:spAutoFit/>
-          </a:bodyPr>
-          <a:lstStyle/>
-          <a:p>
-            <a:pPr>
-              <a:spcAft>
-                <a:spcPts val="1000"/>
-              </a:spcAft>
-            </a:pPr>
-            <a:r>
-              <a:rPr sz="1300" dirty="0">
-                <a:latin typeface="Arial"/>
-              </a:rPr>
-              <a:t>▪ The tuna group (Scombridae: </a:t>
-            </a:r>
-            <a:r>
-              <a:rPr sz="1300" dirty="0" err="1">
-                <a:latin typeface="Arial"/>
-              </a:rPr>
-              <a:t>tongkol</a:t>
-            </a:r>
-            <a:r>
-              <a:rPr sz="1300" dirty="0">
-                <a:latin typeface="Arial"/>
-              </a:rPr>
-              <a:t>, tuna, </a:t>
-            </a:r>
-            <a:r>
-              <a:rPr sz="1300" dirty="0" err="1">
-                <a:latin typeface="Arial"/>
-              </a:rPr>
-              <a:t>cakalang</a:t>
-            </a:r>
-            <a:r>
-              <a:rPr sz="1300" dirty="0">
-                <a:latin typeface="Arial"/>
-              </a:rPr>
-              <a:t>) is by far the largest contributor, about 36 g per person per day, a third of all fish eaten.</a:t>
-            </a:r>
-          </a:p>
-          <a:p>
-            <a:pPr>
-              <a:spcAft>
-                <a:spcPts val="1000"/>
-              </a:spcAft>
-            </a:pPr>
-            <a:r>
-              <a:rPr sz="1300" dirty="0">
-                <a:latin typeface="Arial"/>
-              </a:rPr>
-              <a:t>▪ </a:t>
-            </a:r>
-            <a:r>
-              <a:rPr lang="en-US" sz="1300" dirty="0">
-                <a:latin typeface="Arial"/>
-              </a:rPr>
-              <a:t>Composite</a:t>
-            </a:r>
-            <a:r>
-              <a:rPr sz="1300" dirty="0">
-                <a:latin typeface="Arial"/>
-              </a:rPr>
-              <a:t> fresh fish</a:t>
-            </a:r>
-            <a:r>
-              <a:rPr lang="en-US" sz="1300" dirty="0">
-                <a:latin typeface="Arial"/>
-              </a:rPr>
-              <a:t> (ikan segar </a:t>
-            </a:r>
-            <a:r>
-              <a:rPr lang="en-US" sz="1300" dirty="0" err="1">
-                <a:latin typeface="Arial"/>
-              </a:rPr>
-              <a:t>lainnya</a:t>
-            </a:r>
-            <a:r>
-              <a:rPr lang="en-US" sz="1300" dirty="0">
-                <a:latin typeface="Arial"/>
-              </a:rPr>
-              <a:t>)</a:t>
-            </a:r>
-            <a:r>
-              <a:rPr sz="1300" dirty="0">
-                <a:latin typeface="Arial"/>
-              </a:rPr>
-              <a:t> comes second (21 g), followed by </a:t>
-            </a:r>
-            <a:r>
-              <a:rPr sz="1300" dirty="0" err="1">
-                <a:latin typeface="Arial"/>
-              </a:rPr>
-              <a:t>Caesio</a:t>
-            </a:r>
-            <a:r>
-              <a:rPr sz="1300" dirty="0">
-                <a:latin typeface="Arial"/>
-              </a:rPr>
-              <a:t> </a:t>
-            </a:r>
-            <a:r>
-              <a:rPr sz="1300" dirty="0" err="1">
-                <a:latin typeface="Arial"/>
-              </a:rPr>
-              <a:t>cuning</a:t>
-            </a:r>
-            <a:r>
-              <a:rPr sz="1300" dirty="0">
-                <a:latin typeface="Arial"/>
-              </a:rPr>
-              <a:t> (11 g) and </a:t>
-            </a:r>
-            <a:r>
-              <a:rPr sz="1300" dirty="0" err="1">
-                <a:latin typeface="Arial"/>
-              </a:rPr>
-              <a:t>Rastrelliger</a:t>
-            </a:r>
-            <a:r>
-              <a:rPr sz="1300" dirty="0">
-                <a:latin typeface="Arial"/>
-              </a:rPr>
-              <a:t>, the mackerel group (10 g).</a:t>
-            </a:r>
-          </a:p>
-          <a:p>
-            <a:pPr>
-              <a:spcAft>
-                <a:spcPts val="1000"/>
-              </a:spcAft>
-            </a:pPr>
-            <a:r>
-              <a:rPr sz="1300" dirty="0">
-                <a:latin typeface="Arial"/>
-              </a:rPr>
-              <a:t>▪ </a:t>
-            </a:r>
-            <a:r>
-              <a:rPr lang="en-ID" sz="1300" dirty="0">
-                <a:latin typeface="Arial"/>
-              </a:rPr>
-              <a:t>On the right panel, the remaining species contribute under 4 g per day.</a:t>
-            </a:r>
-            <a:endParaRPr sz="1300" dirty="0">
-              <a:latin typeface="Arial"/>
-            </a:endParaRPr>
-          </a:p>
-          <a:p>
-            <a:pPr>
-              <a:spcAft>
-                <a:spcPts val="1000"/>
-              </a:spcAft>
-            </a:pPr>
-            <a:r>
-              <a:rPr sz="1300" dirty="0">
-                <a:latin typeface="Arial"/>
-              </a:rPr>
-              <a:t>▪ Preserved and fresh forms of the same species are combined.</a:t>
-            </a:r>
-          </a:p>
-        </p:txBody>
-      </p:sp>
     </p:spTree>
   </p:cSld>
   <p:clrMapOvr>
@@ -4562,9 +4649,96 @@
           </a:p>
         </p:txBody>
       </p:sp>
+      <p:sp>
+        <p:nvSpPr>
+          <p:cNvPr id="4" name="TextBox 3"/>
+          <p:cNvSpPr txBox="1"/>
+          <p:nvPr/>
+        </p:nvSpPr>
+        <p:spPr>
+          <a:xfrm>
+            <a:off x="7181088" y="1371600"/>
+            <a:ext cx="4553712" cy="2077492"/>
+          </a:xfrm>
+          <a:prstGeom prst="rect">
+            <a:avLst/>
+          </a:prstGeom>
+          <a:noFill/>
+        </p:spPr>
+        <p:txBody>
+          <a:bodyPr wrap="square">
+            <a:spAutoFit/>
+          </a:bodyPr>
+          <a:lstStyle/>
+          <a:p>
+            <a:pPr>
+              <a:spcAft>
+                <a:spcPts val="1000"/>
+              </a:spcAft>
+            </a:pPr>
+            <a:r>
+              <a:rPr sz="1300" dirty="0">
+                <a:latin typeface="Arial"/>
+              </a:rPr>
+              <a:t>▪ Iron and zinc intake are below the requirement: 61% for iron and 67% for zinc (reference: adult women).</a:t>
+            </a:r>
+          </a:p>
+          <a:p>
+            <a:pPr>
+              <a:spcAft>
+                <a:spcPts val="1000"/>
+              </a:spcAft>
+            </a:pPr>
+            <a:r>
+              <a:rPr sz="1300" dirty="0">
+                <a:latin typeface="Arial"/>
+              </a:rPr>
+              <a:t>▪ Niacin intake is 155% of the requirement. Aquatic foods provide 38</a:t>
+            </a:r>
+            <a:r>
+              <a:rPr lang="en-US" sz="1300" dirty="0">
+                <a:latin typeface="Arial"/>
+              </a:rPr>
+              <a:t>% </a:t>
+            </a:r>
+            <a:r>
+              <a:rPr sz="1300" dirty="0">
+                <a:latin typeface="Arial"/>
+              </a:rPr>
+              <a:t>of it.</a:t>
+            </a:r>
+          </a:p>
+          <a:p>
+            <a:pPr>
+              <a:spcAft>
+                <a:spcPts val="1000"/>
+              </a:spcAft>
+            </a:pPr>
+            <a:r>
+              <a:rPr sz="1300" dirty="0">
+                <a:latin typeface="Arial"/>
+              </a:rPr>
+              <a:t>▪ Aquatic foods provide 4% of the iron requirement and 11% of the zinc requirement, from 12% of food weight.</a:t>
+            </a:r>
+          </a:p>
+          <a:p>
+            <a:pPr>
+              <a:spcAft>
+                <a:spcPts val="1000"/>
+              </a:spcAft>
+            </a:pPr>
+            <a:r>
+              <a:rPr sz="1300" dirty="0">
+                <a:latin typeface="Arial"/>
+              </a:rPr>
+              <a:t>▪ Fish values now include the edible portion (19 to 61%), so fish contributions are lower than in the previous version.</a:t>
+            </a:r>
+          </a:p>
+        </p:txBody>
+      </p:sp>
       <p:pic>
         <p:nvPicPr>
-          <p:cNvPr id="3" name="Picture 2" descr="nutrient_dri_iron_zinc_niacin.png"/>
+          <p:cNvPr id="5" name="Picture 4" descr="nutrient_dri_iron_zinc_niacin.png"/>
           <p:cNvPicPr>
             <a:picLocks noChangeAspect="1"/>
           </p:cNvPicPr>
@@ -4586,116 +4760,6 @@
           </a:prstGeom>
         </p:spPr>
       </p:pic>
-      <p:sp>
-        <p:nvSpPr>
-          <p:cNvPr id="4" name="TextBox 3"/>
-          <p:cNvSpPr txBox="1"/>
-          <p:nvPr/>
-        </p:nvSpPr>
-        <p:spPr>
-          <a:xfrm>
-            <a:off x="7181088" y="2069968"/>
-            <a:ext cx="4553712" cy="2149306"/>
-          </a:xfrm>
-          <a:prstGeom prst="rect">
-            <a:avLst/>
-          </a:prstGeom>
-          <a:noFill/>
-        </p:spPr>
-        <p:txBody>
-          <a:bodyPr wrap="square">
-            <a:spAutoFit/>
-          </a:bodyPr>
-          <a:lstStyle/>
-          <a:p>
-            <a:pPr>
-              <a:spcAft>
-                <a:spcPts val="1000"/>
-              </a:spcAft>
-            </a:pPr>
-            <a:r>
-              <a:rPr sz="1300" dirty="0">
-                <a:latin typeface="Arial"/>
-              </a:rPr>
-              <a:t>▪ Iron and zinc fall short of the daily requirement: average intake reaches 67% for iron and 76% for zinc (reference: adult women).</a:t>
-            </a:r>
-          </a:p>
-          <a:p>
-            <a:pPr>
-              <a:spcAft>
-                <a:spcPts val="1000"/>
-              </a:spcAft>
-            </a:pPr>
-            <a:r>
-              <a:rPr sz="1300" dirty="0">
-                <a:latin typeface="Arial"/>
-              </a:rPr>
-              <a:t>▪ Niacin is the opposite </a:t>
-            </a:r>
-            <a:r>
-              <a:rPr lang="en-ID" sz="1300" dirty="0">
-                <a:latin typeface="Arial"/>
-              </a:rPr>
-              <a:t>story:</a:t>
-            </a:r>
-            <a:r>
-              <a:rPr sz="1300" dirty="0">
-                <a:latin typeface="Arial"/>
-              </a:rPr>
-              <a:t> intake nearly doubles the requirement (193%), and aquatic foods alone cover </a:t>
-            </a:r>
-            <a:r>
-              <a:rPr lang="en-ID" sz="1300" dirty="0">
-                <a:latin typeface="Arial"/>
-              </a:rPr>
-              <a:t>three-quarters</a:t>
-            </a:r>
-            <a:r>
-              <a:rPr sz="1300" dirty="0">
-                <a:latin typeface="Arial"/>
-              </a:rPr>
-              <a:t> of it.</a:t>
-            </a:r>
-          </a:p>
-          <a:p>
-            <a:pPr>
-              <a:spcAft>
-                <a:spcPts val="1000"/>
-              </a:spcAft>
-            </a:pPr>
-            <a:r>
-              <a:rPr sz="1300" dirty="0">
-                <a:latin typeface="Arial"/>
-              </a:rPr>
-              <a:t>▪ The aquatic bars show how much fish matters beyond its weight</a:t>
-            </a:r>
-            <a:r>
-              <a:rPr lang="en-US" sz="1300" dirty="0">
-                <a:latin typeface="Arial"/>
-              </a:rPr>
-              <a:t>.</a:t>
-            </a:r>
-            <a:r>
-              <a:rPr sz="1300" dirty="0">
-                <a:latin typeface="Arial"/>
-              </a:rPr>
-              <a:t> </a:t>
-            </a:r>
-            <a:r>
-              <a:rPr lang="en-US" sz="1300" dirty="0">
-                <a:latin typeface="Arial"/>
-              </a:rPr>
-              <a:t>F</a:t>
-            </a:r>
-            <a:r>
-              <a:rPr sz="1300" dirty="0">
-                <a:latin typeface="Arial"/>
-              </a:rPr>
-              <a:t>ish supplies a fifth of the zinc requirement and a tenth of iron, while making up only an eighth of the diet.</a:t>
-            </a:r>
-          </a:p>
-        </p:txBody>
-      </p:sp>
     </p:spTree>
   </p:cSld>
   <p:clrMapOvr>
@@ -4757,9 +4821,58 @@
           </a:p>
         </p:txBody>
       </p:sp>
+      <p:sp>
+        <p:nvSpPr>
+          <p:cNvPr id="4" name="TextBox 3"/>
+          <p:cNvSpPr txBox="1"/>
+          <p:nvPr/>
+        </p:nvSpPr>
+        <p:spPr>
+          <a:xfrm>
+            <a:off x="7178040" y="1371600"/>
+            <a:ext cx="4553712" cy="1420902"/>
+          </a:xfrm>
+          <a:prstGeom prst="rect">
+            <a:avLst/>
+          </a:prstGeom>
+          <a:noFill/>
+        </p:spPr>
+        <p:txBody>
+          <a:bodyPr wrap="square">
+            <a:spAutoFit/>
+          </a:bodyPr>
+          <a:lstStyle/>
+          <a:p>
+            <a:pPr>
+              <a:spcAft>
+                <a:spcPts val="1000"/>
+              </a:spcAft>
+            </a:pPr>
+            <a:r>
+              <a:rPr sz="1300" dirty="0">
+                <a:latin typeface="Arial"/>
+              </a:rPr>
+              <a:t>▪ Of 146,636 consumption records, 18 report amounts far above what other households buy of the same item.</a:t>
+            </a:r>
+          </a:p>
+          <a:p>
+            <a:pPr>
+              <a:spcAft>
+                <a:spcPts val="1000"/>
+              </a:spcAft>
+            </a:pPr>
+            <a:r>
+              <a:rPr sz="1300" dirty="0">
+                <a:latin typeface="Arial"/>
+              </a:rPr>
+              <a:t>▪ Ten of the 18 are instant noodles: households that report many packets per person per day, possibly small food stalls.</a:t>
+            </a:r>
+          </a:p>
+        </p:txBody>
+      </p:sp>
       <p:pic>
         <p:nvPicPr>
-          <p:cNvPr id="3" name="Picture 2" descr="qa_volume_flags.png"/>
+          <p:cNvPr id="5" name="Picture 4" descr="image.png"/>
           <p:cNvPicPr>
             <a:picLocks noChangeAspect="1"/>
           </p:cNvPicPr>
@@ -4781,79 +4894,6 @@
           </a:prstGeom>
         </p:spPr>
       </p:pic>
-      <p:sp>
-        <p:nvSpPr>
-          <p:cNvPr id="4" name="TextBox 3"/>
-          <p:cNvSpPr txBox="1"/>
-          <p:nvPr/>
-        </p:nvSpPr>
-        <p:spPr>
-          <a:xfrm>
-            <a:off x="7178040" y="1371600"/>
-            <a:ext cx="4553712" cy="1420902"/>
-          </a:xfrm>
-          <a:prstGeom prst="rect">
-            <a:avLst/>
-          </a:prstGeom>
-          <a:noFill/>
-        </p:spPr>
-        <p:txBody>
-          <a:bodyPr wrap="square">
-            <a:spAutoFit/>
-          </a:bodyPr>
-          <a:lstStyle/>
-          <a:p>
-            <a:pPr>
-              <a:spcAft>
-                <a:spcPts val="1000"/>
-              </a:spcAft>
-            </a:pPr>
-            <a:r>
-              <a:rPr sz="1300" dirty="0">
-                <a:latin typeface="Arial"/>
-              </a:rPr>
-              <a:t>▪ Out of roughly 140,000 consumption records, only 18 report amounts far outside what other households buy of the same item.</a:t>
-            </a:r>
-          </a:p>
-          <a:p>
-            <a:pPr>
-              <a:spcAft>
-                <a:spcPts val="1000"/>
-              </a:spcAft>
-            </a:pPr>
-            <a:r>
-              <a:rPr sz="1300" dirty="0">
-                <a:latin typeface="Arial"/>
-              </a:rPr>
-              <a:t>▪ More than half concern instant noodles: households reporting implausibly many packets per person per day</a:t>
-            </a:r>
-            <a:r>
-              <a:rPr lang="en-US" sz="1300" dirty="0">
-                <a:latin typeface="Arial"/>
-              </a:rPr>
-              <a:t> (possibly a small restaurant such as </a:t>
-            </a:r>
-            <a:r>
-              <a:rPr lang="en-US" sz="1300" i="1" dirty="0" err="1">
-                <a:latin typeface="Arial"/>
-              </a:rPr>
-              <a:t>warung</a:t>
-            </a:r>
-            <a:r>
-              <a:rPr lang="en-US" sz="1300" dirty="0">
-                <a:latin typeface="Arial"/>
-              </a:rPr>
-              <a:t>)</a:t>
-            </a:r>
-            <a:r>
-              <a:rPr sz="1300" dirty="0">
-                <a:latin typeface="Arial"/>
-              </a:rPr>
-              <a:t>.</a:t>
-            </a:r>
-          </a:p>
-        </p:txBody>
-      </p:sp>
     </p:spTree>
   </p:cSld>
   <p:clrMapOvr>
@@ -4915,9 +4955,71 @@
           </a:p>
         </p:txBody>
       </p:sp>
+      <p:sp>
+        <p:nvSpPr>
+          <p:cNvPr id="4" name="TextBox 3"/>
+          <p:cNvSpPr txBox="1"/>
+          <p:nvPr/>
+        </p:nvSpPr>
+        <p:spPr>
+          <a:xfrm>
+            <a:off x="719822" y="4994737"/>
+            <a:ext cx="9891934" cy="1349087"/>
+          </a:xfrm>
+          <a:prstGeom prst="rect">
+            <a:avLst/>
+          </a:prstGeom>
+          <a:noFill/>
+        </p:spPr>
+        <p:txBody>
+          <a:bodyPr wrap="square">
+            <a:spAutoFit/>
+          </a:bodyPr>
+          <a:lstStyle/>
+          <a:p>
+            <a:pPr>
+              <a:spcAft>
+                <a:spcPts val="1000"/>
+              </a:spcAft>
+            </a:pPr>
+            <a:r>
+              <a:rPr sz="1300" dirty="0">
+                <a:latin typeface="Arial"/>
+              </a:rPr>
+              <a:t>▪ Screening the composition values flags six items across three nutrients.</a:t>
+            </a:r>
+          </a:p>
+          <a:p>
+            <a:pPr>
+              <a:spcAft>
+                <a:spcPts val="1000"/>
+              </a:spcAft>
+            </a:pPr>
+            <a:r>
+              <a:rPr sz="1300" dirty="0">
+                <a:latin typeface="Arial"/>
+              </a:rPr>
+              <a:t>▪ The copper values (520 mg per 100 g of peanuts, 117 mg per 100 g of apples) are impossible and point to a unit error in TKPI.</a:t>
+            </a:r>
+          </a:p>
+          <a:p>
+            <a:pPr>
+              <a:spcAft>
+                <a:spcPts val="1000"/>
+              </a:spcAft>
+            </a:pPr>
+            <a:r>
+              <a:rPr sz="1300" dirty="0">
+                <a:latin typeface="Arial"/>
+              </a:rPr>
+              <a:t>▪ The other two flags are true extremes, not errors: salt is 99% mineral matter, and dried spices are rich in thiamin.</a:t>
+            </a:r>
+          </a:p>
+        </p:txBody>
+      </p:sp>
       <p:pic>
         <p:nvPicPr>
-          <p:cNvPr id="3" name="Picture 2" descr="qa_fct_flag_matrix.png"/>
+          <p:cNvPr id="5" name="Picture 4" descr="qa_fct_flag_matrix.png"/>
           <p:cNvPicPr>
             <a:picLocks noChangeAspect="1"/>
           </p:cNvPicPr>
@@ -4932,135 +5034,13 @@
         <p:spPr>
           <a:xfrm>
             <a:off x="457200" y="1188719"/>
-            <a:ext cx="10417178" cy="3680735"/>
+            <a:ext cx="10417178" cy="3472393"/>
           </a:xfrm>
           <a:prstGeom prst="rect">
             <a:avLst/>
           </a:prstGeom>
         </p:spPr>
       </p:pic>
-      <p:sp>
-        <p:nvSpPr>
-          <p:cNvPr id="4" name="TextBox 3"/>
-          <p:cNvSpPr txBox="1"/>
-          <p:nvPr/>
-        </p:nvSpPr>
-        <p:spPr>
-          <a:xfrm>
-            <a:off x="719822" y="4994737"/>
-            <a:ext cx="9891934" cy="1349087"/>
-          </a:xfrm>
-          <a:prstGeom prst="rect">
-            <a:avLst/>
-          </a:prstGeom>
-          <a:noFill/>
-        </p:spPr>
-        <p:txBody>
-          <a:bodyPr wrap="square">
-            <a:spAutoFit/>
-          </a:bodyPr>
-          <a:lstStyle/>
-          <a:p>
-            <a:pPr>
-              <a:spcAft>
-                <a:spcPts val="1000"/>
-              </a:spcAft>
-            </a:pPr>
-            <a:r>
-              <a:rPr sz="1300" dirty="0">
-                <a:latin typeface="Arial"/>
-              </a:rPr>
-              <a:t>▪ Screening the food composition values flags 8 food items across 5 nutrients.</a:t>
-            </a:r>
-          </a:p>
-          <a:p>
-            <a:pPr>
-              <a:spcAft>
-                <a:spcPts val="1000"/>
-              </a:spcAft>
-            </a:pPr>
-            <a:r>
-              <a:rPr sz="1300" dirty="0">
-                <a:latin typeface="Arial"/>
-              </a:rPr>
-              <a:t>▪ The copper values (520 mg per 100 g of peanuts</a:t>
-            </a:r>
-            <a:r>
-              <a:rPr lang="en-US" sz="1300" dirty="0">
-                <a:latin typeface="Arial"/>
-              </a:rPr>
-              <a:t> and</a:t>
-            </a:r>
-            <a:r>
-              <a:rPr sz="1300" dirty="0">
-                <a:latin typeface="Arial"/>
-              </a:rPr>
-              <a:t> 117</a:t>
-            </a:r>
-            <a:r>
-              <a:rPr lang="en-US" sz="1300" dirty="0">
-                <a:latin typeface="Arial"/>
-              </a:rPr>
-              <a:t> mg</a:t>
-            </a:r>
-            <a:r>
-              <a:rPr sz="1300" dirty="0">
-                <a:latin typeface="Arial"/>
-              </a:rPr>
-              <a:t> </a:t>
-            </a:r>
-            <a:r>
-              <a:rPr lang="en-ID" sz="1300" dirty="0">
-                <a:latin typeface="Arial"/>
-              </a:rPr>
-              <a:t>per 100 g of</a:t>
-            </a:r>
-            <a:r>
-              <a:rPr sz="1300" dirty="0">
-                <a:latin typeface="Arial"/>
-              </a:rPr>
-              <a:t> apples) are impossible and point </a:t>
-            </a:r>
-            <a:r>
-              <a:rPr lang="en-ID" sz="1300" dirty="0">
-                <a:latin typeface="Arial"/>
-              </a:rPr>
-              <a:t>to</a:t>
-            </a:r>
-            <a:r>
-              <a:rPr sz="1300" dirty="0">
-                <a:latin typeface="Arial"/>
-              </a:rPr>
-              <a:t> a unit error in the source table</a:t>
-            </a:r>
-            <a:r>
-              <a:rPr lang="en-US" sz="1300" dirty="0">
-                <a:latin typeface="Arial"/>
-              </a:rPr>
-              <a:t> (TKPI)</a:t>
-            </a:r>
-            <a:r>
-              <a:rPr sz="1300" dirty="0">
-                <a:latin typeface="Arial"/>
-              </a:rPr>
-              <a:t>.</a:t>
-            </a:r>
-          </a:p>
-          <a:p>
-            <a:pPr>
-              <a:spcAft>
-                <a:spcPts val="1000"/>
-              </a:spcAft>
-            </a:pPr>
-            <a:r>
-              <a:rPr sz="1300" dirty="0">
-                <a:latin typeface="Arial"/>
-              </a:rPr>
-              <a:t>▪ The other flags are true extremes, not errors: dry tea leaves are exceptionally rich in potassium, and salt is almost pure mineral matter.</a:t>
-            </a:r>
-          </a:p>
-        </p:txBody>
-      </p:sp>
     </p:spTree>
   </p:cSld>
   <p:clrMapOvr>
